--- a/全然為你.pptx
+++ b/全然為你.pptx
@@ -169,10 +169,9 @@
           <a:lstStyle/>
           <a:p>
             <a:r>
-              <a:rPr lang="zh-TW" altLang="en-US" smtClean="0"/>
+              <a:rPr lang="zh-TW" altLang="en-US"/>
               <a:t>按一下以編輯母片標題樣式</a:t>
             </a:r>
-            <a:endParaRPr lang="zh-TW" altLang="en-US"/>
           </a:p>
         </p:txBody>
       </p:sp>
@@ -288,10 +287,9 @@
           </a:lstStyle>
           <a:p>
             <a:r>
-              <a:rPr lang="zh-TW" altLang="en-US" smtClean="0"/>
+              <a:rPr lang="zh-TW" altLang="en-US"/>
               <a:t>按一下以編輯母片副標題樣式</a:t>
             </a:r>
-            <a:endParaRPr lang="zh-TW" altLang="en-US"/>
           </a:p>
         </p:txBody>
       </p:sp>
@@ -313,7 +311,7 @@
             <a:fld id="{4769CA7A-1D8F-4511-A228-785831C6C6F9}" type="datetimeFigureOut">
               <a:rPr lang="zh-TW" altLang="en-US" smtClean="0"/>
               <a:pPr/>
-              <a:t>2023/2/25</a:t>
+              <a:t>2024/6/15</a:t>
             </a:fld>
             <a:endParaRPr lang="zh-TW" altLang="en-US"/>
           </a:p>
@@ -403,10 +401,9 @@
           <a:lstStyle/>
           <a:p>
             <a:r>
-              <a:rPr lang="zh-TW" altLang="en-US" smtClean="0"/>
+              <a:rPr lang="zh-TW" altLang="en-US"/>
               <a:t>按一下以編輯母片標題樣式</a:t>
             </a:r>
-            <a:endParaRPr lang="zh-TW" altLang="en-US"/>
           </a:p>
         </p:txBody>
       </p:sp>
@@ -427,38 +424,37 @@
           <a:p>
             <a:pPr lvl="0"/>
             <a:r>
-              <a:rPr lang="zh-TW" altLang="en-US" smtClean="0"/>
+              <a:rPr lang="zh-TW" altLang="en-US"/>
               <a:t>按一下以編輯母片文字樣式</a:t>
             </a:r>
           </a:p>
           <a:p>
             <a:pPr lvl="1"/>
             <a:r>
-              <a:rPr lang="zh-TW" altLang="en-US" smtClean="0"/>
+              <a:rPr lang="zh-TW" altLang="en-US"/>
               <a:t>第二層</a:t>
             </a:r>
           </a:p>
           <a:p>
             <a:pPr lvl="2"/>
             <a:r>
-              <a:rPr lang="zh-TW" altLang="en-US" smtClean="0"/>
+              <a:rPr lang="zh-TW" altLang="en-US"/>
               <a:t>第三層</a:t>
             </a:r>
           </a:p>
           <a:p>
             <a:pPr lvl="3"/>
             <a:r>
-              <a:rPr lang="zh-TW" altLang="en-US" smtClean="0"/>
+              <a:rPr lang="zh-TW" altLang="en-US"/>
               <a:t>第四層</a:t>
             </a:r>
           </a:p>
           <a:p>
             <a:pPr lvl="4"/>
             <a:r>
-              <a:rPr lang="zh-TW" altLang="en-US" smtClean="0"/>
+              <a:rPr lang="zh-TW" altLang="en-US"/>
               <a:t>第五層</a:t>
             </a:r>
-            <a:endParaRPr lang="zh-TW" altLang="en-US"/>
           </a:p>
         </p:txBody>
       </p:sp>
@@ -480,7 +476,7 @@
             <a:fld id="{4769CA7A-1D8F-4511-A228-785831C6C6F9}" type="datetimeFigureOut">
               <a:rPr lang="zh-TW" altLang="en-US" smtClean="0"/>
               <a:pPr/>
-              <a:t>2023/2/25</a:t>
+              <a:t>2024/6/15</a:t>
             </a:fld>
             <a:endParaRPr lang="zh-TW" altLang="en-US"/>
           </a:p>
@@ -575,10 +571,9 @@
           <a:lstStyle/>
           <a:p>
             <a:r>
-              <a:rPr lang="zh-TW" altLang="en-US" smtClean="0"/>
+              <a:rPr lang="zh-TW" altLang="en-US"/>
               <a:t>按一下以編輯母片標題樣式</a:t>
             </a:r>
-            <a:endParaRPr lang="zh-TW" altLang="en-US"/>
           </a:p>
         </p:txBody>
       </p:sp>
@@ -604,38 +599,37 @@
           <a:p>
             <a:pPr lvl="0"/>
             <a:r>
-              <a:rPr lang="zh-TW" altLang="en-US" smtClean="0"/>
+              <a:rPr lang="zh-TW" altLang="en-US"/>
               <a:t>按一下以編輯母片文字樣式</a:t>
             </a:r>
           </a:p>
           <a:p>
             <a:pPr lvl="1"/>
             <a:r>
-              <a:rPr lang="zh-TW" altLang="en-US" smtClean="0"/>
+              <a:rPr lang="zh-TW" altLang="en-US"/>
               <a:t>第二層</a:t>
             </a:r>
           </a:p>
           <a:p>
             <a:pPr lvl="2"/>
             <a:r>
-              <a:rPr lang="zh-TW" altLang="en-US" smtClean="0"/>
+              <a:rPr lang="zh-TW" altLang="en-US"/>
               <a:t>第三層</a:t>
             </a:r>
           </a:p>
           <a:p>
             <a:pPr lvl="3"/>
             <a:r>
-              <a:rPr lang="zh-TW" altLang="en-US" smtClean="0"/>
+              <a:rPr lang="zh-TW" altLang="en-US"/>
               <a:t>第四層</a:t>
             </a:r>
           </a:p>
           <a:p>
             <a:pPr lvl="4"/>
             <a:r>
-              <a:rPr lang="zh-TW" altLang="en-US" smtClean="0"/>
+              <a:rPr lang="zh-TW" altLang="en-US"/>
               <a:t>第五層</a:t>
             </a:r>
-            <a:endParaRPr lang="zh-TW" altLang="en-US"/>
           </a:p>
         </p:txBody>
       </p:sp>
@@ -657,7 +651,7 @@
             <a:fld id="{4769CA7A-1D8F-4511-A228-785831C6C6F9}" type="datetimeFigureOut">
               <a:rPr lang="zh-TW" altLang="en-US" smtClean="0"/>
               <a:pPr/>
-              <a:t>2023/2/25</a:t>
+              <a:t>2024/6/15</a:t>
             </a:fld>
             <a:endParaRPr lang="zh-TW" altLang="en-US"/>
           </a:p>
@@ -747,10 +741,9 @@
           <a:lstStyle/>
           <a:p>
             <a:r>
-              <a:rPr lang="zh-TW" altLang="en-US" smtClean="0"/>
+              <a:rPr lang="zh-TW" altLang="en-US"/>
               <a:t>按一下以編輯母片標題樣式</a:t>
             </a:r>
-            <a:endParaRPr lang="zh-TW" altLang="en-US"/>
           </a:p>
         </p:txBody>
       </p:sp>
@@ -771,38 +764,37 @@
           <a:p>
             <a:pPr lvl="0"/>
             <a:r>
-              <a:rPr lang="zh-TW" altLang="en-US" smtClean="0"/>
+              <a:rPr lang="zh-TW" altLang="en-US"/>
               <a:t>按一下以編輯母片文字樣式</a:t>
             </a:r>
           </a:p>
           <a:p>
             <a:pPr lvl="1"/>
             <a:r>
-              <a:rPr lang="zh-TW" altLang="en-US" smtClean="0"/>
+              <a:rPr lang="zh-TW" altLang="en-US"/>
               <a:t>第二層</a:t>
             </a:r>
           </a:p>
           <a:p>
             <a:pPr lvl="2"/>
             <a:r>
-              <a:rPr lang="zh-TW" altLang="en-US" smtClean="0"/>
+              <a:rPr lang="zh-TW" altLang="en-US"/>
               <a:t>第三層</a:t>
             </a:r>
           </a:p>
           <a:p>
             <a:pPr lvl="3"/>
             <a:r>
-              <a:rPr lang="zh-TW" altLang="en-US" smtClean="0"/>
+              <a:rPr lang="zh-TW" altLang="en-US"/>
               <a:t>第四層</a:t>
             </a:r>
           </a:p>
           <a:p>
             <a:pPr lvl="4"/>
             <a:r>
-              <a:rPr lang="zh-TW" altLang="en-US" smtClean="0"/>
+              <a:rPr lang="zh-TW" altLang="en-US"/>
               <a:t>第五層</a:t>
             </a:r>
-            <a:endParaRPr lang="zh-TW" altLang="en-US"/>
           </a:p>
         </p:txBody>
       </p:sp>
@@ -824,7 +816,7 @@
             <a:fld id="{4769CA7A-1D8F-4511-A228-785831C6C6F9}" type="datetimeFigureOut">
               <a:rPr lang="zh-TW" altLang="en-US" smtClean="0"/>
               <a:pPr/>
-              <a:t>2023/2/25</a:t>
+              <a:t>2024/6/15</a:t>
             </a:fld>
             <a:endParaRPr lang="zh-TW" altLang="en-US"/>
           </a:p>
@@ -923,10 +915,9 @@
           </a:lstStyle>
           <a:p>
             <a:r>
-              <a:rPr lang="zh-TW" altLang="en-US" smtClean="0"/>
+              <a:rPr lang="zh-TW" altLang="en-US"/>
               <a:t>按一下以編輯母片標題樣式</a:t>
             </a:r>
-            <a:endParaRPr lang="zh-TW" altLang="en-US"/>
           </a:p>
         </p:txBody>
       </p:sp>
@@ -1043,7 +1034,7 @@
           <a:p>
             <a:pPr lvl="0"/>
             <a:r>
-              <a:rPr lang="zh-TW" altLang="en-US" smtClean="0"/>
+              <a:rPr lang="zh-TW" altLang="en-US"/>
               <a:t>按一下以編輯母片文字樣式</a:t>
             </a:r>
           </a:p>
@@ -1067,7 +1058,7 @@
             <a:fld id="{4769CA7A-1D8F-4511-A228-785831C6C6F9}" type="datetimeFigureOut">
               <a:rPr lang="zh-TW" altLang="en-US" smtClean="0"/>
               <a:pPr/>
-              <a:t>2023/2/25</a:t>
+              <a:t>2024/6/15</a:t>
             </a:fld>
             <a:endParaRPr lang="zh-TW" altLang="en-US"/>
           </a:p>
@@ -1157,10 +1148,9 @@
           <a:lstStyle/>
           <a:p>
             <a:r>
-              <a:rPr lang="zh-TW" altLang="en-US" smtClean="0"/>
+              <a:rPr lang="zh-TW" altLang="en-US"/>
               <a:t>按一下以編輯母片標題樣式</a:t>
             </a:r>
-            <a:endParaRPr lang="zh-TW" altLang="en-US"/>
           </a:p>
         </p:txBody>
       </p:sp>
@@ -1214,38 +1204,37 @@
           <a:p>
             <a:pPr lvl="0"/>
             <a:r>
-              <a:rPr lang="zh-TW" altLang="en-US" smtClean="0"/>
+              <a:rPr lang="zh-TW" altLang="en-US"/>
               <a:t>按一下以編輯母片文字樣式</a:t>
             </a:r>
           </a:p>
           <a:p>
             <a:pPr lvl="1"/>
             <a:r>
-              <a:rPr lang="zh-TW" altLang="en-US" smtClean="0"/>
+              <a:rPr lang="zh-TW" altLang="en-US"/>
               <a:t>第二層</a:t>
             </a:r>
           </a:p>
           <a:p>
             <a:pPr lvl="2"/>
             <a:r>
-              <a:rPr lang="zh-TW" altLang="en-US" smtClean="0"/>
+              <a:rPr lang="zh-TW" altLang="en-US"/>
               <a:t>第三層</a:t>
             </a:r>
           </a:p>
           <a:p>
             <a:pPr lvl="3"/>
             <a:r>
-              <a:rPr lang="zh-TW" altLang="en-US" smtClean="0"/>
+              <a:rPr lang="zh-TW" altLang="en-US"/>
               <a:t>第四層</a:t>
             </a:r>
           </a:p>
           <a:p>
             <a:pPr lvl="4"/>
             <a:r>
-              <a:rPr lang="zh-TW" altLang="en-US" smtClean="0"/>
+              <a:rPr lang="zh-TW" altLang="en-US"/>
               <a:t>第五層</a:t>
             </a:r>
-            <a:endParaRPr lang="zh-TW" altLang="en-US"/>
           </a:p>
         </p:txBody>
       </p:sp>
@@ -1299,38 +1288,37 @@
           <a:p>
             <a:pPr lvl="0"/>
             <a:r>
-              <a:rPr lang="zh-TW" altLang="en-US" smtClean="0"/>
+              <a:rPr lang="zh-TW" altLang="en-US"/>
               <a:t>按一下以編輯母片文字樣式</a:t>
             </a:r>
           </a:p>
           <a:p>
             <a:pPr lvl="1"/>
             <a:r>
-              <a:rPr lang="zh-TW" altLang="en-US" smtClean="0"/>
+              <a:rPr lang="zh-TW" altLang="en-US"/>
               <a:t>第二層</a:t>
             </a:r>
           </a:p>
           <a:p>
             <a:pPr lvl="2"/>
             <a:r>
-              <a:rPr lang="zh-TW" altLang="en-US" smtClean="0"/>
+              <a:rPr lang="zh-TW" altLang="en-US"/>
               <a:t>第三層</a:t>
             </a:r>
           </a:p>
           <a:p>
             <a:pPr lvl="3"/>
             <a:r>
-              <a:rPr lang="zh-TW" altLang="en-US" smtClean="0"/>
+              <a:rPr lang="zh-TW" altLang="en-US"/>
               <a:t>第四層</a:t>
             </a:r>
           </a:p>
           <a:p>
             <a:pPr lvl="4"/>
             <a:r>
-              <a:rPr lang="zh-TW" altLang="en-US" smtClean="0"/>
+              <a:rPr lang="zh-TW" altLang="en-US"/>
               <a:t>第五層</a:t>
             </a:r>
-            <a:endParaRPr lang="zh-TW" altLang="en-US"/>
           </a:p>
         </p:txBody>
       </p:sp>
@@ -1352,7 +1340,7 @@
             <a:fld id="{4769CA7A-1D8F-4511-A228-785831C6C6F9}" type="datetimeFigureOut">
               <a:rPr lang="zh-TW" altLang="en-US" smtClean="0"/>
               <a:pPr/>
-              <a:t>2023/2/25</a:t>
+              <a:t>2024/6/15</a:t>
             </a:fld>
             <a:endParaRPr lang="zh-TW" altLang="en-US"/>
           </a:p>
@@ -1446,10 +1434,9 @@
           </a:lstStyle>
           <a:p>
             <a:r>
-              <a:rPr lang="zh-TW" altLang="en-US" smtClean="0"/>
+              <a:rPr lang="zh-TW" altLang="en-US"/>
               <a:t>按一下以編輯母片標題樣式</a:t>
             </a:r>
-            <a:endParaRPr lang="zh-TW" altLang="en-US"/>
           </a:p>
         </p:txBody>
       </p:sp>
@@ -1512,7 +1499,7 @@
           <a:p>
             <a:pPr lvl="0"/>
             <a:r>
-              <a:rPr lang="zh-TW" altLang="en-US" smtClean="0"/>
+              <a:rPr lang="zh-TW" altLang="en-US"/>
               <a:t>按一下以編輯母片文字樣式</a:t>
             </a:r>
           </a:p>
@@ -1568,38 +1555,37 @@
           <a:p>
             <a:pPr lvl="0"/>
             <a:r>
-              <a:rPr lang="zh-TW" altLang="en-US" smtClean="0"/>
+              <a:rPr lang="zh-TW" altLang="en-US"/>
               <a:t>按一下以編輯母片文字樣式</a:t>
             </a:r>
           </a:p>
           <a:p>
             <a:pPr lvl="1"/>
             <a:r>
-              <a:rPr lang="zh-TW" altLang="en-US" smtClean="0"/>
+              <a:rPr lang="zh-TW" altLang="en-US"/>
               <a:t>第二層</a:t>
             </a:r>
           </a:p>
           <a:p>
             <a:pPr lvl="2"/>
             <a:r>
-              <a:rPr lang="zh-TW" altLang="en-US" smtClean="0"/>
+              <a:rPr lang="zh-TW" altLang="en-US"/>
               <a:t>第三層</a:t>
             </a:r>
           </a:p>
           <a:p>
             <a:pPr lvl="3"/>
             <a:r>
-              <a:rPr lang="zh-TW" altLang="en-US" smtClean="0"/>
+              <a:rPr lang="zh-TW" altLang="en-US"/>
               <a:t>第四層</a:t>
             </a:r>
           </a:p>
           <a:p>
             <a:pPr lvl="4"/>
             <a:r>
-              <a:rPr lang="zh-TW" altLang="en-US" smtClean="0"/>
+              <a:rPr lang="zh-TW" altLang="en-US"/>
               <a:t>第五層</a:t>
             </a:r>
-            <a:endParaRPr lang="zh-TW" altLang="en-US"/>
           </a:p>
         </p:txBody>
       </p:sp>
@@ -1662,7 +1648,7 @@
           <a:p>
             <a:pPr lvl="0"/>
             <a:r>
-              <a:rPr lang="zh-TW" altLang="en-US" smtClean="0"/>
+              <a:rPr lang="zh-TW" altLang="en-US"/>
               <a:t>按一下以編輯母片文字樣式</a:t>
             </a:r>
           </a:p>
@@ -1718,38 +1704,37 @@
           <a:p>
             <a:pPr lvl="0"/>
             <a:r>
-              <a:rPr lang="zh-TW" altLang="en-US" smtClean="0"/>
+              <a:rPr lang="zh-TW" altLang="en-US"/>
               <a:t>按一下以編輯母片文字樣式</a:t>
             </a:r>
           </a:p>
           <a:p>
             <a:pPr lvl="1"/>
             <a:r>
-              <a:rPr lang="zh-TW" altLang="en-US" smtClean="0"/>
+              <a:rPr lang="zh-TW" altLang="en-US"/>
               <a:t>第二層</a:t>
             </a:r>
           </a:p>
           <a:p>
             <a:pPr lvl="2"/>
             <a:r>
-              <a:rPr lang="zh-TW" altLang="en-US" smtClean="0"/>
+              <a:rPr lang="zh-TW" altLang="en-US"/>
               <a:t>第三層</a:t>
             </a:r>
           </a:p>
           <a:p>
             <a:pPr lvl="3"/>
             <a:r>
-              <a:rPr lang="zh-TW" altLang="en-US" smtClean="0"/>
+              <a:rPr lang="zh-TW" altLang="en-US"/>
               <a:t>第四層</a:t>
             </a:r>
           </a:p>
           <a:p>
             <a:pPr lvl="4"/>
             <a:r>
-              <a:rPr lang="zh-TW" altLang="en-US" smtClean="0"/>
+              <a:rPr lang="zh-TW" altLang="en-US"/>
               <a:t>第五層</a:t>
             </a:r>
-            <a:endParaRPr lang="zh-TW" altLang="en-US"/>
           </a:p>
         </p:txBody>
       </p:sp>
@@ -1771,7 +1756,7 @@
             <a:fld id="{4769CA7A-1D8F-4511-A228-785831C6C6F9}" type="datetimeFigureOut">
               <a:rPr lang="zh-TW" altLang="en-US" smtClean="0"/>
               <a:pPr/>
-              <a:t>2023/2/25</a:t>
+              <a:t>2024/6/15</a:t>
             </a:fld>
             <a:endParaRPr lang="zh-TW" altLang="en-US"/>
           </a:p>
@@ -1861,10 +1846,9 @@
           <a:lstStyle/>
           <a:p>
             <a:r>
-              <a:rPr lang="zh-TW" altLang="en-US" smtClean="0"/>
+              <a:rPr lang="zh-TW" altLang="en-US"/>
               <a:t>按一下以編輯母片標題樣式</a:t>
             </a:r>
-            <a:endParaRPr lang="zh-TW" altLang="en-US"/>
           </a:p>
         </p:txBody>
       </p:sp>
@@ -1886,7 +1870,7 @@
             <a:fld id="{4769CA7A-1D8F-4511-A228-785831C6C6F9}" type="datetimeFigureOut">
               <a:rPr lang="zh-TW" altLang="en-US" smtClean="0"/>
               <a:pPr/>
-              <a:t>2023/2/25</a:t>
+              <a:t>2024/6/15</a:t>
             </a:fld>
             <a:endParaRPr lang="zh-TW" altLang="en-US"/>
           </a:p>
@@ -1978,7 +1962,7 @@
             <a:fld id="{4769CA7A-1D8F-4511-A228-785831C6C6F9}" type="datetimeFigureOut">
               <a:rPr lang="zh-TW" altLang="en-US" smtClean="0"/>
               <a:pPr/>
-              <a:t>2023/2/25</a:t>
+              <a:t>2024/6/15</a:t>
             </a:fld>
             <a:endParaRPr lang="zh-TW" altLang="en-US"/>
           </a:p>
@@ -2077,10 +2061,9 @@
           </a:lstStyle>
           <a:p>
             <a:r>
-              <a:rPr lang="zh-TW" altLang="en-US" smtClean="0"/>
+              <a:rPr lang="zh-TW" altLang="en-US"/>
               <a:t>按一下以編輯母片標題樣式</a:t>
             </a:r>
-            <a:endParaRPr lang="zh-TW" altLang="en-US"/>
           </a:p>
         </p:txBody>
       </p:sp>
@@ -2134,38 +2117,37 @@
           <a:p>
             <a:pPr lvl="0"/>
             <a:r>
-              <a:rPr lang="zh-TW" altLang="en-US" smtClean="0"/>
+              <a:rPr lang="zh-TW" altLang="en-US"/>
               <a:t>按一下以編輯母片文字樣式</a:t>
             </a:r>
           </a:p>
           <a:p>
             <a:pPr lvl="1"/>
             <a:r>
-              <a:rPr lang="zh-TW" altLang="en-US" smtClean="0"/>
+              <a:rPr lang="zh-TW" altLang="en-US"/>
               <a:t>第二層</a:t>
             </a:r>
           </a:p>
           <a:p>
             <a:pPr lvl="2"/>
             <a:r>
-              <a:rPr lang="zh-TW" altLang="en-US" smtClean="0"/>
+              <a:rPr lang="zh-TW" altLang="en-US"/>
               <a:t>第三層</a:t>
             </a:r>
           </a:p>
           <a:p>
             <a:pPr lvl="3"/>
             <a:r>
-              <a:rPr lang="zh-TW" altLang="en-US" smtClean="0"/>
+              <a:rPr lang="zh-TW" altLang="en-US"/>
               <a:t>第四層</a:t>
             </a:r>
           </a:p>
           <a:p>
             <a:pPr lvl="4"/>
             <a:r>
-              <a:rPr lang="zh-TW" altLang="en-US" smtClean="0"/>
+              <a:rPr lang="zh-TW" altLang="en-US"/>
               <a:t>第五層</a:t>
             </a:r>
-            <a:endParaRPr lang="zh-TW" altLang="en-US"/>
           </a:p>
         </p:txBody>
       </p:sp>
@@ -2228,7 +2210,7 @@
           <a:p>
             <a:pPr lvl="0"/>
             <a:r>
-              <a:rPr lang="zh-TW" altLang="en-US" smtClean="0"/>
+              <a:rPr lang="zh-TW" altLang="en-US"/>
               <a:t>按一下以編輯母片文字樣式</a:t>
             </a:r>
           </a:p>
@@ -2252,7 +2234,7 @@
             <a:fld id="{4769CA7A-1D8F-4511-A228-785831C6C6F9}" type="datetimeFigureOut">
               <a:rPr lang="zh-TW" altLang="en-US" smtClean="0"/>
               <a:pPr/>
-              <a:t>2023/2/25</a:t>
+              <a:t>2024/6/15</a:t>
             </a:fld>
             <a:endParaRPr lang="zh-TW" altLang="en-US"/>
           </a:p>
@@ -2351,10 +2333,9 @@
           </a:lstStyle>
           <a:p>
             <a:r>
-              <a:rPr lang="zh-TW" altLang="en-US" smtClean="0"/>
+              <a:rPr lang="zh-TW" altLang="en-US"/>
               <a:t>按一下以編輯母片標題樣式</a:t>
             </a:r>
-            <a:endParaRPr lang="zh-TW" altLang="en-US"/>
           </a:p>
         </p:txBody>
       </p:sp>
@@ -2416,10 +2397,9 @@
           </a:lstStyle>
           <a:p>
             <a:r>
-              <a:rPr lang="zh-TW" altLang="en-US" smtClean="0"/>
+              <a:rPr lang="zh-TW" altLang="en-US"/>
               <a:t>按一下圖示以新增圖片</a:t>
             </a:r>
-            <a:endParaRPr lang="zh-TW" altLang="en-US"/>
           </a:p>
         </p:txBody>
       </p:sp>
@@ -2482,7 +2462,7 @@
           <a:p>
             <a:pPr lvl="0"/>
             <a:r>
-              <a:rPr lang="zh-TW" altLang="en-US" smtClean="0"/>
+              <a:rPr lang="zh-TW" altLang="en-US"/>
               <a:t>按一下以編輯母片文字樣式</a:t>
             </a:r>
           </a:p>
@@ -2506,7 +2486,7 @@
             <a:fld id="{4769CA7A-1D8F-4511-A228-785831C6C6F9}" type="datetimeFigureOut">
               <a:rPr lang="zh-TW" altLang="en-US" smtClean="0"/>
               <a:pPr/>
-              <a:t>2023/2/25</a:t>
+              <a:t>2024/6/15</a:t>
             </a:fld>
             <a:endParaRPr lang="zh-TW" altLang="en-US"/>
           </a:p>
@@ -2616,10 +2596,9 @@
           <a:lstStyle/>
           <a:p>
             <a:r>
-              <a:rPr lang="zh-TW" altLang="en-US" smtClean="0"/>
+              <a:rPr lang="zh-TW" altLang="en-US"/>
               <a:t>按一下以編輯母片標題樣式</a:t>
             </a:r>
-            <a:endParaRPr lang="zh-TW" altLang="en-US"/>
           </a:p>
         </p:txBody>
       </p:sp>
@@ -2650,38 +2629,37 @@
           <a:p>
             <a:pPr lvl="0"/>
             <a:r>
-              <a:rPr lang="zh-TW" altLang="en-US" smtClean="0"/>
+              <a:rPr lang="zh-TW" altLang="en-US"/>
               <a:t>按一下以編輯母片文字樣式</a:t>
             </a:r>
           </a:p>
           <a:p>
             <a:pPr lvl="1"/>
             <a:r>
-              <a:rPr lang="zh-TW" altLang="en-US" smtClean="0"/>
+              <a:rPr lang="zh-TW" altLang="en-US"/>
               <a:t>第二層</a:t>
             </a:r>
           </a:p>
           <a:p>
             <a:pPr lvl="2"/>
             <a:r>
-              <a:rPr lang="zh-TW" altLang="en-US" smtClean="0"/>
+              <a:rPr lang="zh-TW" altLang="en-US"/>
               <a:t>第三層</a:t>
             </a:r>
           </a:p>
           <a:p>
             <a:pPr lvl="3"/>
             <a:r>
-              <a:rPr lang="zh-TW" altLang="en-US" smtClean="0"/>
+              <a:rPr lang="zh-TW" altLang="en-US"/>
               <a:t>第四層</a:t>
             </a:r>
           </a:p>
           <a:p>
             <a:pPr lvl="4"/>
             <a:r>
-              <a:rPr lang="zh-TW" altLang="en-US" smtClean="0"/>
+              <a:rPr lang="zh-TW" altLang="en-US"/>
               <a:t>第五層</a:t>
             </a:r>
-            <a:endParaRPr lang="zh-TW" altLang="en-US"/>
           </a:p>
         </p:txBody>
       </p:sp>
@@ -2721,7 +2699,7 @@
             <a:fld id="{4769CA7A-1D8F-4511-A228-785831C6C6F9}" type="datetimeFigureOut">
               <a:rPr lang="zh-TW" altLang="en-US" smtClean="0"/>
               <a:pPr/>
-              <a:t>2023/2/25</a:t>
+              <a:t>2024/6/15</a:t>
             </a:fld>
             <a:endParaRPr lang="zh-TW" altLang="en-US"/>
           </a:p>
@@ -3129,7 +3107,7 @@
                 <a:latin typeface="微軟正黑體" pitchFamily="34" charset="-120"/>
                 <a:ea typeface="微軟正黑體" pitchFamily="34" charset="-120"/>
               </a:rPr>
-              <a:t>全然為袮</a:t>
+              <a:t>全然為祢</a:t>
             </a:r>
             <a:endParaRPr lang="zh-TW" altLang="en-US" sz="7200" b="1" i="1" dirty="0">
               <a:solidFill>
@@ -3243,7 +3221,7 @@
                 <a:latin typeface="微軟正黑體" pitchFamily="34" charset="-120"/>
                 <a:ea typeface="微軟正黑體" pitchFamily="34" charset="-120"/>
               </a:rPr>
-              <a:t>袮</a:t>
+              <a:t>祢</a:t>
             </a:r>
             <a:r>
               <a:rPr lang="zh-TW" altLang="en-US" sz="6400" b="1" dirty="0">
@@ -3299,7 +3277,7 @@
           <a:p>
             <a:pPr algn="ctr"/>
             <a:r>
-              <a:rPr lang="en-US" sz="3600" b="1" dirty="0" smtClean="0">
+              <a:rPr lang="en-US" sz="3600" b="1" dirty="0">
                 <a:solidFill>
                   <a:srgbClr val="660033"/>
                 </a:solidFill>
@@ -3309,7 +3287,7 @@
               <a:t>( </a:t>
             </a:r>
             <a:r>
-              <a:rPr lang="zh-CN" altLang="en-US" sz="3600" b="1" dirty="0" smtClean="0">
+              <a:rPr lang="zh-CN" altLang="en-US" sz="3600" b="1" dirty="0">
                 <a:solidFill>
                   <a:srgbClr val="660033"/>
                 </a:solidFill>
@@ -3319,24 +3297,14 @@
               <a:t>正歌</a:t>
             </a:r>
             <a:r>
-              <a:rPr lang="en-US" sz="3600" b="1" dirty="0" smtClean="0">
+              <a:rPr lang="en-US" sz="3600" b="1" dirty="0">
                 <a:solidFill>
                   <a:srgbClr val="660033"/>
                 </a:solidFill>
                 <a:latin typeface="Microsoft JhengHei" panose="020B0604030504040204" pitchFamily="34" charset="-120"/>
                 <a:ea typeface="Microsoft JhengHei" panose="020B0604030504040204" pitchFamily="34" charset="-120"/>
               </a:rPr>
-              <a:t> </a:t>
-            </a:r>
-            <a:r>
-              <a:rPr lang="en-US" sz="3600" b="1" dirty="0" smtClean="0">
-                <a:solidFill>
-                  <a:srgbClr val="660033"/>
-                </a:solidFill>
-                <a:latin typeface="Microsoft JhengHei" panose="020B0604030504040204" pitchFamily="34" charset="-120"/>
-                <a:ea typeface="Microsoft JhengHei" panose="020B0604030504040204" pitchFamily="34" charset="-120"/>
-              </a:rPr>
-              <a:t>)</a:t>
+              <a:t> )</a:t>
             </a:r>
             <a:endParaRPr lang="vi-VN" sz="3600" b="1" dirty="0">
               <a:solidFill>
@@ -3420,7 +3388,7 @@
                 <a:latin typeface="微軟正黑體" pitchFamily="34" charset="-120"/>
                 <a:ea typeface="微軟正黑體" pitchFamily="34" charset="-120"/>
               </a:rPr>
-              <a:t>袮</a:t>
+              <a:t>祢</a:t>
             </a:r>
             <a:r>
               <a:rPr lang="zh-TW" altLang="en-US" sz="6400" b="1" dirty="0">
@@ -3481,7 +3449,7 @@
           <a:p>
             <a:pPr algn="ctr"/>
             <a:r>
-              <a:rPr lang="en-US" sz="3600" b="1" dirty="0" smtClean="0">
+              <a:rPr lang="en-US" sz="3600" b="1" dirty="0">
                 <a:solidFill>
                   <a:srgbClr val="660033"/>
                 </a:solidFill>
@@ -3498,20 +3466,10 @@
                 <a:latin typeface="Microsoft JhengHei" panose="020B0604030504040204" pitchFamily="34" charset="-120"/>
                 <a:ea typeface="Microsoft JhengHei" panose="020B0604030504040204" pitchFamily="34" charset="-120"/>
               </a:rPr>
-              <a:t>正</a:t>
-            </a:r>
-            <a:r>
-              <a:rPr lang="zh-CN" altLang="en-US" sz="3600" b="1" dirty="0" smtClean="0">
-                <a:solidFill>
-                  <a:srgbClr val="660033"/>
-                </a:solidFill>
-                <a:latin typeface="Microsoft JhengHei" panose="020B0604030504040204" pitchFamily="34" charset="-120"/>
-                <a:ea typeface="Microsoft JhengHei" panose="020B0604030504040204" pitchFamily="34" charset="-120"/>
-              </a:rPr>
-              <a:t>歌 </a:t>
-            </a:r>
-            <a:r>
-              <a:rPr lang="en-US" sz="3600" b="1" dirty="0" smtClean="0">
+              <a:t>正歌 </a:t>
+            </a:r>
+            <a:r>
+              <a:rPr lang="en-US" sz="3600" b="1" dirty="0">
                 <a:solidFill>
                   <a:srgbClr val="660033"/>
                 </a:solidFill>
@@ -3624,7 +3582,7 @@
                 <a:latin typeface="微軟正黑體" pitchFamily="34" charset="-120"/>
                 <a:ea typeface="微軟正黑體" pitchFamily="34" charset="-120"/>
               </a:rPr>
-              <a:t>袮  我的主</a:t>
+              <a:t>祢  我的主</a:t>
             </a:r>
             <a:endParaRPr lang="en-US" altLang="zh-TW" sz="6400" b="1" dirty="0">
               <a:solidFill>
@@ -3660,7 +3618,7 @@
           <a:p>
             <a:pPr algn="ctr"/>
             <a:r>
-              <a:rPr lang="en-US" sz="3600" b="1" dirty="0" smtClean="0">
+              <a:rPr lang="en-US" sz="3600" b="1" dirty="0">
                 <a:solidFill>
                   <a:srgbClr val="660033"/>
                 </a:solidFill>
@@ -3677,20 +3635,10 @@
                 <a:latin typeface="Microsoft JhengHei" panose="020B0604030504040204" pitchFamily="34" charset="-120"/>
                 <a:ea typeface="Microsoft JhengHei" panose="020B0604030504040204" pitchFamily="34" charset="-120"/>
               </a:rPr>
-              <a:t>正</a:t>
-            </a:r>
-            <a:r>
-              <a:rPr lang="zh-CN" altLang="en-US" sz="3600" b="1" dirty="0" smtClean="0">
-                <a:solidFill>
-                  <a:srgbClr val="660033"/>
-                </a:solidFill>
-                <a:latin typeface="Microsoft JhengHei" panose="020B0604030504040204" pitchFamily="34" charset="-120"/>
-                <a:ea typeface="Microsoft JhengHei" panose="020B0604030504040204" pitchFamily="34" charset="-120"/>
-              </a:rPr>
-              <a:t>歌 </a:t>
-            </a:r>
-            <a:r>
-              <a:rPr lang="en-US" sz="3600" b="1" dirty="0" smtClean="0">
+              <a:t>正歌 </a:t>
+            </a:r>
+            <a:r>
+              <a:rPr lang="en-US" sz="3600" b="1" dirty="0">
                 <a:solidFill>
                   <a:srgbClr val="660033"/>
                 </a:solidFill>
@@ -3781,7 +3729,7 @@
                 <a:latin typeface="微軟正黑體" pitchFamily="34" charset="-120"/>
                 <a:ea typeface="微軟正黑體" pitchFamily="34" charset="-120"/>
               </a:rPr>
-              <a:t>袮</a:t>
+              <a:t>祢</a:t>
             </a:r>
             <a:r>
               <a:rPr lang="zh-TW" altLang="en-US" sz="6400" b="1" dirty="0">
@@ -3823,7 +3771,7 @@
                 <a:latin typeface="微軟正黑體" pitchFamily="34" charset="-120"/>
                 <a:ea typeface="微軟正黑體" pitchFamily="34" charset="-120"/>
               </a:rPr>
-              <a:t>袮</a:t>
+              <a:t>祢</a:t>
             </a:r>
             <a:r>
               <a:rPr lang="zh-TW" altLang="en-US" sz="6400" b="1" dirty="0">
@@ -3862,7 +3810,7 @@
           <a:p>
             <a:pPr algn="ctr"/>
             <a:r>
-              <a:rPr lang="en-US" sz="3600" b="1" dirty="0" smtClean="0">
+              <a:rPr lang="en-US" sz="3600" b="1" dirty="0">
                 <a:solidFill>
                   <a:srgbClr val="660033"/>
                 </a:solidFill>
@@ -3879,20 +3827,10 @@
                 <a:latin typeface="Microsoft JhengHei" panose="020B0604030504040204" pitchFamily="34" charset="-120"/>
                 <a:ea typeface="Microsoft JhengHei" panose="020B0604030504040204" pitchFamily="34" charset="-120"/>
               </a:rPr>
-              <a:t>正</a:t>
-            </a:r>
-            <a:r>
-              <a:rPr lang="zh-CN" altLang="en-US" sz="3600" b="1" dirty="0" smtClean="0">
-                <a:solidFill>
-                  <a:srgbClr val="660033"/>
-                </a:solidFill>
-                <a:latin typeface="Microsoft JhengHei" panose="020B0604030504040204" pitchFamily="34" charset="-120"/>
-                <a:ea typeface="Microsoft JhengHei" panose="020B0604030504040204" pitchFamily="34" charset="-120"/>
-              </a:rPr>
-              <a:t>歌 </a:t>
-            </a:r>
-            <a:r>
-              <a:rPr lang="en-US" sz="3600" b="1" dirty="0" smtClean="0">
+              <a:t>正歌 </a:t>
+            </a:r>
+            <a:r>
+              <a:rPr lang="en-US" sz="3600" b="1" dirty="0">
                 <a:solidFill>
                   <a:srgbClr val="660033"/>
                 </a:solidFill>
@@ -3983,7 +3921,7 @@
                 <a:latin typeface="微軟正黑體" pitchFamily="34" charset="-120"/>
                 <a:ea typeface="微軟正黑體" pitchFamily="34" charset="-120"/>
               </a:rPr>
-              <a:t>袮</a:t>
+              <a:t>祢</a:t>
             </a:r>
             <a:endParaRPr lang="en-US" altLang="zh-TW" sz="6400" b="1" dirty="0">
               <a:solidFill>
@@ -4041,7 +3979,7 @@
           <a:p>
             <a:pPr algn="ctr"/>
             <a:r>
-              <a:rPr lang="en-US" sz="3600" b="1" dirty="0" smtClean="0">
+              <a:rPr lang="en-US" sz="3600" b="1" dirty="0">
                 <a:solidFill>
                   <a:srgbClr val="660033"/>
                 </a:solidFill>
@@ -4058,20 +3996,10 @@
                 <a:latin typeface="Microsoft JhengHei" panose="020B0604030504040204" pitchFamily="34" charset="-120"/>
                 <a:ea typeface="Microsoft JhengHei" panose="020B0604030504040204" pitchFamily="34" charset="-120"/>
               </a:rPr>
-              <a:t>副</a:t>
-            </a:r>
-            <a:r>
-              <a:rPr lang="zh-CN" altLang="en-US" sz="3600" b="1" dirty="0" smtClean="0">
-                <a:solidFill>
-                  <a:srgbClr val="660033"/>
-                </a:solidFill>
-                <a:latin typeface="Microsoft JhengHei" panose="020B0604030504040204" pitchFamily="34" charset="-120"/>
-                <a:ea typeface="Microsoft JhengHei" panose="020B0604030504040204" pitchFamily="34" charset="-120"/>
-              </a:rPr>
-              <a:t>歌 </a:t>
-            </a:r>
-            <a:r>
-              <a:rPr lang="en-US" sz="3600" b="1" dirty="0" smtClean="0">
+              <a:t>副歌 </a:t>
+            </a:r>
+            <a:r>
+              <a:rPr lang="en-US" sz="3600" b="1" dirty="0">
                 <a:solidFill>
                   <a:srgbClr val="660033"/>
                 </a:solidFill>
@@ -4177,34 +4105,24 @@
               <a:t>只願</a:t>
             </a:r>
             <a:r>
-              <a:rPr lang="zh-CN" altLang="en-US" sz="6400" b="1" dirty="0" smtClean="0">
+              <a:rPr lang="zh-CN" altLang="en-US" sz="6400" b="1" dirty="0">
                 <a:solidFill>
                   <a:srgbClr val="660033"/>
                 </a:solidFill>
                 <a:latin typeface="微軟正黑體" pitchFamily="34" charset="-120"/>
                 <a:ea typeface="微軟正黑體" pitchFamily="34" charset="-120"/>
               </a:rPr>
-              <a:t>袮</a:t>
-            </a:r>
-            <a:r>
-              <a:rPr lang="zh-TW" altLang="en-US" sz="6400" b="1" dirty="0" smtClean="0">
+              <a:t>祢</a:t>
+            </a:r>
+            <a:r>
+              <a:rPr lang="zh-TW" altLang="en-US" sz="6400" b="1" dirty="0">
                 <a:solidFill>
                   <a:srgbClr val="660033"/>
                 </a:solidFill>
                 <a:latin typeface="微軟正黑體" pitchFamily="34" charset="-120"/>
                 <a:ea typeface="微軟正黑體" pitchFamily="34" charset="-120"/>
               </a:rPr>
-              <a:t>心得滿</a:t>
-            </a:r>
-            <a:r>
-              <a:rPr lang="zh-TW" altLang="en-US" sz="6400" b="1" dirty="0">
-                <a:solidFill>
-                  <a:srgbClr val="660033"/>
-                </a:solidFill>
-                <a:latin typeface="微軟正黑體" pitchFamily="34" charset="-120"/>
-                <a:ea typeface="微軟正黑體" pitchFamily="34" charset="-120"/>
-              </a:rPr>
-              <a:t>足</a:t>
+              <a:t>心得滿足</a:t>
             </a:r>
           </a:p>
         </p:txBody>
@@ -4233,7 +4151,7 @@
           <a:p>
             <a:pPr algn="ctr"/>
             <a:r>
-              <a:rPr lang="en-US" sz="3600" b="1" dirty="0" smtClean="0">
+              <a:rPr lang="en-US" sz="3600" b="1" dirty="0">
                 <a:solidFill>
                   <a:srgbClr val="660033"/>
                 </a:solidFill>
@@ -4250,20 +4168,10 @@
                 <a:latin typeface="Microsoft JhengHei" panose="020B0604030504040204" pitchFamily="34" charset="-120"/>
                 <a:ea typeface="Microsoft JhengHei" panose="020B0604030504040204" pitchFamily="34" charset="-120"/>
               </a:rPr>
-              <a:t>副</a:t>
-            </a:r>
-            <a:r>
-              <a:rPr lang="zh-CN" altLang="en-US" sz="3600" b="1" dirty="0" smtClean="0">
-                <a:solidFill>
-                  <a:srgbClr val="660033"/>
-                </a:solidFill>
-                <a:latin typeface="Microsoft JhengHei" panose="020B0604030504040204" pitchFamily="34" charset="-120"/>
-                <a:ea typeface="Microsoft JhengHei" panose="020B0604030504040204" pitchFamily="34" charset="-120"/>
-              </a:rPr>
-              <a:t>歌 </a:t>
-            </a:r>
-            <a:r>
-              <a:rPr lang="en-US" sz="3600" b="1" dirty="0" smtClean="0">
+              <a:t>副歌 </a:t>
+            </a:r>
+            <a:r>
+              <a:rPr lang="en-US" sz="3600" b="1" dirty="0">
                 <a:solidFill>
                   <a:srgbClr val="660033"/>
                 </a:solidFill>
@@ -4354,7 +4262,7 @@
                 <a:latin typeface="微軟正黑體" pitchFamily="34" charset="-120"/>
                 <a:ea typeface="微軟正黑體" pitchFamily="34" charset="-120"/>
               </a:rPr>
-              <a:t>袮</a:t>
+              <a:t>祢</a:t>
             </a:r>
             <a:endParaRPr lang="en-US" altLang="zh-TW" sz="6400" b="1" dirty="0">
               <a:solidFill>
@@ -4412,7 +4320,7 @@
           <a:p>
             <a:pPr algn="ctr"/>
             <a:r>
-              <a:rPr lang="en-US" sz="3600" b="1" dirty="0" smtClean="0">
+              <a:rPr lang="en-US" sz="3600" b="1" dirty="0">
                 <a:solidFill>
                   <a:srgbClr val="660033"/>
                 </a:solidFill>
@@ -4429,20 +4337,10 @@
                 <a:latin typeface="Microsoft JhengHei" panose="020B0604030504040204" pitchFamily="34" charset="-120"/>
                 <a:ea typeface="Microsoft JhengHei" panose="020B0604030504040204" pitchFamily="34" charset="-120"/>
               </a:rPr>
-              <a:t>副</a:t>
-            </a:r>
-            <a:r>
-              <a:rPr lang="zh-CN" altLang="en-US" sz="3600" b="1" dirty="0" smtClean="0">
-                <a:solidFill>
-                  <a:srgbClr val="660033"/>
-                </a:solidFill>
-                <a:latin typeface="Microsoft JhengHei" panose="020B0604030504040204" pitchFamily="34" charset="-120"/>
-                <a:ea typeface="Microsoft JhengHei" panose="020B0604030504040204" pitchFamily="34" charset="-120"/>
-              </a:rPr>
-              <a:t>歌 </a:t>
-            </a:r>
-            <a:r>
-              <a:rPr lang="en-US" sz="3600" b="1" dirty="0" smtClean="0">
+              <a:t>副歌 </a:t>
+            </a:r>
+            <a:r>
+              <a:rPr lang="en-US" sz="3600" b="1" dirty="0">
                 <a:solidFill>
                   <a:srgbClr val="660033"/>
                 </a:solidFill>
@@ -4574,7 +4472,7 @@
           <a:p>
             <a:pPr algn="ctr"/>
             <a:r>
-              <a:rPr lang="en-US" sz="3600" b="1" dirty="0" smtClean="0">
+              <a:rPr lang="en-US" sz="3600" b="1" dirty="0">
                 <a:solidFill>
                   <a:srgbClr val="660033"/>
                 </a:solidFill>
@@ -4591,20 +4489,10 @@
                 <a:latin typeface="Microsoft JhengHei" panose="020B0604030504040204" pitchFamily="34" charset="-120"/>
                 <a:ea typeface="Microsoft JhengHei" panose="020B0604030504040204" pitchFamily="34" charset="-120"/>
               </a:rPr>
-              <a:t>副</a:t>
-            </a:r>
-            <a:r>
-              <a:rPr lang="zh-CN" altLang="en-US" sz="3600" b="1" dirty="0" smtClean="0">
-                <a:solidFill>
-                  <a:srgbClr val="660033"/>
-                </a:solidFill>
-                <a:latin typeface="Microsoft JhengHei" panose="020B0604030504040204" pitchFamily="34" charset="-120"/>
-                <a:ea typeface="Microsoft JhengHei" panose="020B0604030504040204" pitchFamily="34" charset="-120"/>
-              </a:rPr>
-              <a:t>歌 </a:t>
-            </a:r>
-            <a:r>
-              <a:rPr lang="en-US" sz="3600" b="1" dirty="0" smtClean="0">
+              <a:t>副歌 </a:t>
+            </a:r>
+            <a:r>
+              <a:rPr lang="en-US" sz="3600" b="1" dirty="0">
                 <a:solidFill>
                   <a:srgbClr val="660033"/>
                 </a:solidFill>
